--- a/assets/fiches/B4-fiche-1h30.pptx
+++ b/assets/fiches/B4-fiche-1h30.pptx
@@ -3721,7 +3721,7 @@
                 </a:solidFill>
                 <a:latin typeface="Arial"/>
               </a:rPr>
-              <a:t>. Beaucoup de personnes hésitent à effectuer leurs démarches administratives en ligne. Et c'…</a:t>
+              <a:t>. Beaucoup de personnes hésitent à effectuer leurs démarches administratives en ligne. Et c'est tout à fait normal ! Les sites sont nombreux, les formulaires parfois longs, et la peur de faire une erreur peut bloquer.</a:t>
             </a:r>
           </a:p>
         </p:txBody>
@@ -3968,7 +3968,7 @@
                 </a:solidFill>
                 <a:latin typeface="Arial"/>
               </a:rPr>
-              <a:t>. Voici les grandes étapes que nous allons explorer ensemble aujourd'hui. Chaque partie est …</a:t>
+              <a:t>. Voici les grandes étapes que nous allons explorer ensemble aujourd'hui. Chaque partie est conçue pour vous donner des repères concrets et des outils immédiatement utilisables.</a:t>
             </a:r>
           </a:p>
         </p:txBody>
@@ -4215,7 +4215,7 @@
                 </a:solidFill>
                 <a:latin typeface="Arial"/>
               </a:rPr>
-              <a:t>. Service-public.fr est le site officiel de l'administration française. Géré par la Directio…</a:t>
+              <a:t>. Service-public.fr est le site officiel de l'administration française. Géré par la Direction de l'information légale et administrative (DILA), c'est votre point d'entrée unique et fiable pour toutes vos démarches. Il remplace les longues files d'attente en préfecture ou en mairie.</a:t>
             </a:r>
           </a:p>
         </p:txBody>
@@ -4462,7 +4462,7 @@
                 </a:solidFill>
                 <a:latin typeface="Arial"/>
               </a:rPr>
-              <a:t>. Le site est organisé de manière logique. Voici comment l'utiliser efficacement, étape par …</a:t>
+              <a:t>. Le site est organisé de manière logique. Voici comment l'utiliser efficacement, étape par étape, même si vous n'êtes pas à l'aise avec Internet.</a:t>
             </a:r>
           </a:p>
         </p:txBody>
@@ -4709,7 +4709,7 @@
                 </a:solidFill>
                 <a:latin typeface="Arial"/>
               </a:rPr>
-              <a:t>. boussole.jeunes.gouv.fr est un outil numérique gratuit conçu spécifiquement pour aider les…</a:t>
+              <a:t>. boussole.jeunes.gouv.fr est un outil numérique gratuit conçu spécifiquement pour aider les jeunes de 16 à 30 ans à s'orienter dans leurs démarches administratives, sociales et professionnelles. En quelques questions simples, il vous dirige vers les aides et dispositifs qui correspondent à votre situation.</a:t>
             </a:r>
           </a:p>
         </p:txBody>
@@ -4956,7 +4956,7 @@
                 </a:solidFill>
                 <a:latin typeface="Arial"/>
               </a:rPr>
-              <a:t>. FranceConnect est un dispositif officiel de l'État qui vous permet de vous connecter à la …</a:t>
+              <a:t>. FranceConnect est un dispositif officiel de l'État qui vous permet de vous connecter à la majorité des services publics en ligne avec un seul identifiant. Plus besoin de retenir des dizaines de mots de passe différents !</a:t>
             </a:r>
           </a:p>
         </p:txBody>
@@ -5203,7 +5203,7 @@
                 </a:solidFill>
                 <a:latin typeface="Arial"/>
               </a:rPr>
-              <a:t>. Voici un panorama des sites officiels les plus utiles au quotidien. Tous sont gratuits et …</a:t>
+              <a:t>. Voici un panorama des sites officiels les plus utiles au quotidien. Tous sont gratuits et accessibles depuis un ordinateur, une tablette ou un smartphone.</a:t>
             </a:r>
           </a:p>
         </p:txBody>
@@ -5450,7 +5450,7 @@
                 </a:solidFill>
                 <a:latin typeface="Arial"/>
               </a:rPr>
-              <a:t>. Effectuer des démarches en ligne ne veut pas dire être seul face à l'écran. De nombreux pr…</a:t>
+              <a:t>. Effectuer des démarches en ligne ne veut pas dire être seul face à l'écran. De nombreux professionnels et bénévoles sont là pour vous accompagner, gratuitement, près de chez vous.</a:t>
             </a:r>
           </a:p>
         </p:txBody>
@@ -5697,7 +5697,7 @@
                 </a:solidFill>
                 <a:latin typeface="Arial"/>
               </a:rPr>
-              <a:t>. Vous avez maintenant tous les repères pour commencer. Voici les premières actions concrète…</a:t>
+              <a:t>. Vous avez maintenant tous les repères pour commencer. Voici les premières actions concrètes à entreprendre — à votre rythme, sans pression. Chaque petit pas compte !</a:t>
             </a:r>
           </a:p>
         </p:txBody>

--- a/assets/fiches/B4-fiche-1h30.pptx
+++ b/assets/fiches/B4-fiche-1h30.pptx
@@ -3096,9 +3096,35 @@
         <p:nvPr/>
       </p:nvGrpSpPr>
       <p:grpSpPr/>
-      <p:sp>
-        <p:nvSpPr>
-          <p:cNvPr id="2" name="TextBox 1"/>
+      <p:pic>
+        <p:nvPicPr>
+          <p:cNvPr id="2" name="Picture 1" descr="bg-p1.png"/>
+          <p:cNvPicPr>
+            <a:picLocks noChangeAspect="1"/>
+          </p:cNvPicPr>
+          <p:nvPr/>
+        </p:nvPicPr>
+        <p:blipFill>
+          <a:blip r:embed="rId2">
+            <a:alphaModFix amt="80000"/>
+          </a:blip>
+          <a:stretch>
+            <a:fillRect/>
+          </a:stretch>
+        </p:blipFill>
+        <p:spPr>
+          <a:xfrm>
+            <a:off x="0" y="0"/>
+            <a:ext cx="7556399" cy="10692000"/>
+          </a:xfrm>
+          <a:prstGeom prst="rect">
+            <a:avLst/>
+          </a:prstGeom>
+        </p:spPr>
+      </p:pic>
+      <p:sp>
+        <p:nvSpPr>
+          <p:cNvPr id="3" name="TextBox 2"/>
           <p:cNvSpPr txBox="1"/>
           <p:nvPr/>
         </p:nvSpPr>
@@ -3159,7 +3185,7 @@
       </p:sp>
       <p:sp>
         <p:nvSpPr>
-          <p:cNvPr id="3" name="Rectangle 2"/>
+          <p:cNvPr id="4" name="Rectangle 3"/>
           <p:cNvSpPr/>
           <p:nvPr/>
         </p:nvSpPr>
@@ -3202,7 +3228,7 @@
       </p:sp>
       <p:sp>
         <p:nvSpPr>
-          <p:cNvPr id="4" name="TextBox 3"/>
+          <p:cNvPr id="5" name="TextBox 4"/>
           <p:cNvSpPr txBox="1"/>
           <p:nvPr/>
         </p:nvSpPr>
@@ -3320,7 +3346,7 @@
       </p:sp>
       <p:sp>
         <p:nvSpPr>
-          <p:cNvPr id="5" name="Rectangle 4"/>
+          <p:cNvPr id="6" name="Rectangle 5"/>
           <p:cNvSpPr/>
           <p:nvPr/>
         </p:nvSpPr>
@@ -3363,7 +3389,7 @@
       </p:sp>
       <p:sp>
         <p:nvSpPr>
-          <p:cNvPr id="6" name="TextBox 5"/>
+          <p:cNvPr id="7" name="TextBox 6"/>
           <p:cNvSpPr txBox="1"/>
           <p:nvPr/>
         </p:nvSpPr>
@@ -3481,7 +3507,7 @@
       </p:sp>
       <p:sp>
         <p:nvSpPr>
-          <p:cNvPr id="7" name="Rectangle 6"/>
+          <p:cNvPr id="8" name="Rectangle 7"/>
           <p:cNvSpPr/>
           <p:nvPr/>
         </p:nvSpPr>
@@ -3524,7 +3550,7 @@
       </p:sp>
       <p:sp>
         <p:nvSpPr>
-          <p:cNvPr id="8" name="Rectangle 7"/>
+          <p:cNvPr id="9" name="Rectangle 8"/>
           <p:cNvSpPr/>
           <p:nvPr/>
         </p:nvSpPr>
@@ -3565,7 +3591,7 @@
       </p:sp>
       <p:sp>
         <p:nvSpPr>
-          <p:cNvPr id="9" name="Rectangle 8"/>
+          <p:cNvPr id="10" name="Rectangle 9"/>
           <p:cNvSpPr/>
           <p:nvPr/>
         </p:nvSpPr>
@@ -3606,7 +3632,7 @@
       </p:sp>
       <p:sp>
         <p:nvSpPr>
-          <p:cNvPr id="10" name="TextBox 9"/>
+          <p:cNvPr id="11" name="TextBox 10"/>
           <p:cNvSpPr txBox="1"/>
           <p:nvPr/>
         </p:nvSpPr>
@@ -3648,7 +3674,7 @@
       </p:sp>
       <p:sp>
         <p:nvSpPr>
-          <p:cNvPr id="11" name="TextBox 10"/>
+          <p:cNvPr id="12" name="TextBox 11"/>
           <p:cNvSpPr txBox="1"/>
           <p:nvPr/>
         </p:nvSpPr>
@@ -3728,7 +3754,7 @@
       </p:sp>
       <p:sp>
         <p:nvSpPr>
-          <p:cNvPr id="12" name="Rectangle 11"/>
+          <p:cNvPr id="13" name="Rectangle 12"/>
           <p:cNvSpPr/>
           <p:nvPr/>
         </p:nvSpPr>
@@ -3771,7 +3797,7 @@
       </p:sp>
       <p:sp>
         <p:nvSpPr>
-          <p:cNvPr id="13" name="Rectangle 12"/>
+          <p:cNvPr id="14" name="Rectangle 13"/>
           <p:cNvSpPr/>
           <p:nvPr/>
         </p:nvSpPr>
@@ -3812,7 +3838,7 @@
       </p:sp>
       <p:sp>
         <p:nvSpPr>
-          <p:cNvPr id="14" name="Rectangle 13"/>
+          <p:cNvPr id="15" name="Rectangle 14"/>
           <p:cNvSpPr/>
           <p:nvPr/>
         </p:nvSpPr>
@@ -3853,7 +3879,7 @@
       </p:sp>
       <p:sp>
         <p:nvSpPr>
-          <p:cNvPr id="15" name="TextBox 14"/>
+          <p:cNvPr id="16" name="TextBox 15"/>
           <p:cNvSpPr txBox="1"/>
           <p:nvPr/>
         </p:nvSpPr>
@@ -3895,7 +3921,7 @@
       </p:sp>
       <p:sp>
         <p:nvSpPr>
-          <p:cNvPr id="16" name="TextBox 15"/>
+          <p:cNvPr id="17" name="TextBox 16"/>
           <p:cNvSpPr txBox="1"/>
           <p:nvPr/>
         </p:nvSpPr>
@@ -3975,7 +4001,7 @@
       </p:sp>
       <p:sp>
         <p:nvSpPr>
-          <p:cNvPr id="17" name="Rectangle 16"/>
+          <p:cNvPr id="18" name="Rectangle 17"/>
           <p:cNvSpPr/>
           <p:nvPr/>
         </p:nvSpPr>
@@ -4018,7 +4044,7 @@
       </p:sp>
       <p:sp>
         <p:nvSpPr>
-          <p:cNvPr id="18" name="Rectangle 17"/>
+          <p:cNvPr id="19" name="Rectangle 18"/>
           <p:cNvSpPr/>
           <p:nvPr/>
         </p:nvSpPr>
@@ -4059,7 +4085,7 @@
       </p:sp>
       <p:sp>
         <p:nvSpPr>
-          <p:cNvPr id="19" name="Rectangle 18"/>
+          <p:cNvPr id="20" name="Rectangle 19"/>
           <p:cNvSpPr/>
           <p:nvPr/>
         </p:nvSpPr>
@@ -4100,7 +4126,7 @@
       </p:sp>
       <p:sp>
         <p:nvSpPr>
-          <p:cNvPr id="20" name="TextBox 19"/>
+          <p:cNvPr id="21" name="TextBox 20"/>
           <p:cNvSpPr txBox="1"/>
           <p:nvPr/>
         </p:nvSpPr>
@@ -4142,7 +4168,7 @@
       </p:sp>
       <p:sp>
         <p:nvSpPr>
-          <p:cNvPr id="21" name="TextBox 20"/>
+          <p:cNvPr id="22" name="TextBox 21"/>
           <p:cNvSpPr txBox="1"/>
           <p:nvPr/>
         </p:nvSpPr>
@@ -4222,7 +4248,7 @@
       </p:sp>
       <p:sp>
         <p:nvSpPr>
-          <p:cNvPr id="22" name="Rectangle 21"/>
+          <p:cNvPr id="23" name="Rectangle 22"/>
           <p:cNvSpPr/>
           <p:nvPr/>
         </p:nvSpPr>
@@ -4265,7 +4291,7 @@
       </p:sp>
       <p:sp>
         <p:nvSpPr>
-          <p:cNvPr id="23" name="Rectangle 22"/>
+          <p:cNvPr id="24" name="Rectangle 23"/>
           <p:cNvSpPr/>
           <p:nvPr/>
         </p:nvSpPr>
@@ -4306,7 +4332,7 @@
       </p:sp>
       <p:sp>
         <p:nvSpPr>
-          <p:cNvPr id="24" name="Rectangle 23"/>
+          <p:cNvPr id="25" name="Rectangle 24"/>
           <p:cNvSpPr/>
           <p:nvPr/>
         </p:nvSpPr>
@@ -4347,7 +4373,7 @@
       </p:sp>
       <p:sp>
         <p:nvSpPr>
-          <p:cNvPr id="25" name="TextBox 24"/>
+          <p:cNvPr id="26" name="TextBox 25"/>
           <p:cNvSpPr txBox="1"/>
           <p:nvPr/>
         </p:nvSpPr>
@@ -4389,7 +4415,7 @@
       </p:sp>
       <p:sp>
         <p:nvSpPr>
-          <p:cNvPr id="26" name="TextBox 25"/>
+          <p:cNvPr id="27" name="TextBox 26"/>
           <p:cNvSpPr txBox="1"/>
           <p:nvPr/>
         </p:nvSpPr>
@@ -4469,7 +4495,7 @@
       </p:sp>
       <p:sp>
         <p:nvSpPr>
-          <p:cNvPr id="27" name="Rectangle 26"/>
+          <p:cNvPr id="28" name="Rectangle 27"/>
           <p:cNvSpPr/>
           <p:nvPr/>
         </p:nvSpPr>
@@ -4512,7 +4538,7 @@
       </p:sp>
       <p:sp>
         <p:nvSpPr>
-          <p:cNvPr id="28" name="Rectangle 27"/>
+          <p:cNvPr id="29" name="Rectangle 28"/>
           <p:cNvSpPr/>
           <p:nvPr/>
         </p:nvSpPr>
@@ -4553,7 +4579,7 @@
       </p:sp>
       <p:sp>
         <p:nvSpPr>
-          <p:cNvPr id="29" name="Rectangle 28"/>
+          <p:cNvPr id="30" name="Rectangle 29"/>
           <p:cNvSpPr/>
           <p:nvPr/>
         </p:nvSpPr>
@@ -4594,7 +4620,7 @@
       </p:sp>
       <p:sp>
         <p:nvSpPr>
-          <p:cNvPr id="30" name="TextBox 29"/>
+          <p:cNvPr id="31" name="TextBox 30"/>
           <p:cNvSpPr txBox="1"/>
           <p:nvPr/>
         </p:nvSpPr>
@@ -4636,7 +4662,7 @@
       </p:sp>
       <p:sp>
         <p:nvSpPr>
-          <p:cNvPr id="31" name="TextBox 30"/>
+          <p:cNvPr id="32" name="TextBox 31"/>
           <p:cNvSpPr txBox="1"/>
           <p:nvPr/>
         </p:nvSpPr>
@@ -4716,7 +4742,7 @@
       </p:sp>
       <p:sp>
         <p:nvSpPr>
-          <p:cNvPr id="32" name="Rectangle 31"/>
+          <p:cNvPr id="33" name="Rectangle 32"/>
           <p:cNvSpPr/>
           <p:nvPr/>
         </p:nvSpPr>
@@ -4759,7 +4785,7 @@
       </p:sp>
       <p:sp>
         <p:nvSpPr>
-          <p:cNvPr id="33" name="Rectangle 32"/>
+          <p:cNvPr id="34" name="Rectangle 33"/>
           <p:cNvSpPr/>
           <p:nvPr/>
         </p:nvSpPr>
@@ -4800,7 +4826,7 @@
       </p:sp>
       <p:sp>
         <p:nvSpPr>
-          <p:cNvPr id="34" name="Rectangle 33"/>
+          <p:cNvPr id="35" name="Rectangle 34"/>
           <p:cNvSpPr/>
           <p:nvPr/>
         </p:nvSpPr>
@@ -4841,7 +4867,7 @@
       </p:sp>
       <p:sp>
         <p:nvSpPr>
-          <p:cNvPr id="35" name="TextBox 34"/>
+          <p:cNvPr id="36" name="TextBox 35"/>
           <p:cNvSpPr txBox="1"/>
           <p:nvPr/>
         </p:nvSpPr>
@@ -4883,7 +4909,7 @@
       </p:sp>
       <p:sp>
         <p:nvSpPr>
-          <p:cNvPr id="36" name="TextBox 35"/>
+          <p:cNvPr id="37" name="TextBox 36"/>
           <p:cNvSpPr txBox="1"/>
           <p:nvPr/>
         </p:nvSpPr>
@@ -4963,7 +4989,7 @@
       </p:sp>
       <p:sp>
         <p:nvSpPr>
-          <p:cNvPr id="37" name="Rectangle 36"/>
+          <p:cNvPr id="38" name="Rectangle 37"/>
           <p:cNvSpPr/>
           <p:nvPr/>
         </p:nvSpPr>
@@ -5006,7 +5032,7 @@
       </p:sp>
       <p:sp>
         <p:nvSpPr>
-          <p:cNvPr id="38" name="Rectangle 37"/>
+          <p:cNvPr id="39" name="Rectangle 38"/>
           <p:cNvSpPr/>
           <p:nvPr/>
         </p:nvSpPr>
@@ -5047,7 +5073,7 @@
       </p:sp>
       <p:sp>
         <p:nvSpPr>
-          <p:cNvPr id="39" name="Rectangle 38"/>
+          <p:cNvPr id="40" name="Rectangle 39"/>
           <p:cNvSpPr/>
           <p:nvPr/>
         </p:nvSpPr>
@@ -5088,7 +5114,7 @@
       </p:sp>
       <p:sp>
         <p:nvSpPr>
-          <p:cNvPr id="40" name="TextBox 39"/>
+          <p:cNvPr id="41" name="TextBox 40"/>
           <p:cNvSpPr txBox="1"/>
           <p:nvPr/>
         </p:nvSpPr>
@@ -5130,7 +5156,7 @@
       </p:sp>
       <p:sp>
         <p:nvSpPr>
-          <p:cNvPr id="41" name="TextBox 40"/>
+          <p:cNvPr id="42" name="TextBox 41"/>
           <p:cNvSpPr txBox="1"/>
           <p:nvPr/>
         </p:nvSpPr>
@@ -5210,7 +5236,7 @@
       </p:sp>
       <p:sp>
         <p:nvSpPr>
-          <p:cNvPr id="42" name="Rectangle 41"/>
+          <p:cNvPr id="43" name="Rectangle 42"/>
           <p:cNvSpPr/>
           <p:nvPr/>
         </p:nvSpPr>
@@ -5253,7 +5279,7 @@
       </p:sp>
       <p:sp>
         <p:nvSpPr>
-          <p:cNvPr id="43" name="Rectangle 42"/>
+          <p:cNvPr id="44" name="Rectangle 43"/>
           <p:cNvSpPr/>
           <p:nvPr/>
         </p:nvSpPr>
@@ -5294,7 +5320,7 @@
       </p:sp>
       <p:sp>
         <p:nvSpPr>
-          <p:cNvPr id="44" name="Rectangle 43"/>
+          <p:cNvPr id="45" name="Rectangle 44"/>
           <p:cNvSpPr/>
           <p:nvPr/>
         </p:nvSpPr>
@@ -5335,7 +5361,7 @@
       </p:sp>
       <p:sp>
         <p:nvSpPr>
-          <p:cNvPr id="45" name="TextBox 44"/>
+          <p:cNvPr id="46" name="TextBox 45"/>
           <p:cNvSpPr txBox="1"/>
           <p:nvPr/>
         </p:nvSpPr>
@@ -5377,7 +5403,7 @@
       </p:sp>
       <p:sp>
         <p:nvSpPr>
-          <p:cNvPr id="46" name="TextBox 45"/>
+          <p:cNvPr id="47" name="TextBox 46"/>
           <p:cNvSpPr txBox="1"/>
           <p:nvPr/>
         </p:nvSpPr>
@@ -5457,7 +5483,7 @@
       </p:sp>
       <p:sp>
         <p:nvSpPr>
-          <p:cNvPr id="47" name="Rectangle 46"/>
+          <p:cNvPr id="48" name="Rectangle 47"/>
           <p:cNvSpPr/>
           <p:nvPr/>
         </p:nvSpPr>
@@ -5500,7 +5526,7 @@
       </p:sp>
       <p:sp>
         <p:nvSpPr>
-          <p:cNvPr id="48" name="Rectangle 47"/>
+          <p:cNvPr id="49" name="Rectangle 48"/>
           <p:cNvSpPr/>
           <p:nvPr/>
         </p:nvSpPr>
@@ -5541,7 +5567,7 @@
       </p:sp>
       <p:sp>
         <p:nvSpPr>
-          <p:cNvPr id="49" name="Rectangle 48"/>
+          <p:cNvPr id="50" name="Rectangle 49"/>
           <p:cNvSpPr/>
           <p:nvPr/>
         </p:nvSpPr>
@@ -5582,7 +5608,7 @@
       </p:sp>
       <p:sp>
         <p:nvSpPr>
-          <p:cNvPr id="50" name="TextBox 49"/>
+          <p:cNvPr id="51" name="TextBox 50"/>
           <p:cNvSpPr txBox="1"/>
           <p:nvPr/>
         </p:nvSpPr>
@@ -5624,7 +5650,7 @@
       </p:sp>
       <p:sp>
         <p:nvSpPr>
-          <p:cNvPr id="51" name="TextBox 50"/>
+          <p:cNvPr id="52" name="TextBox 51"/>
           <p:cNvSpPr txBox="1"/>
           <p:nvPr/>
         </p:nvSpPr>
@@ -5704,7 +5730,7 @@
       </p:sp>
       <p:sp>
         <p:nvSpPr>
-          <p:cNvPr id="52" name="Rectangle 51"/>
+          <p:cNvPr id="53" name="Rectangle 52"/>
           <p:cNvSpPr/>
           <p:nvPr/>
         </p:nvSpPr>
@@ -5745,7 +5771,7 @@
       </p:sp>
       <p:sp>
         <p:nvSpPr>
-          <p:cNvPr id="53" name="TextBox 52"/>
+          <p:cNvPr id="54" name="TextBox 53"/>
           <p:cNvSpPr txBox="1"/>
           <p:nvPr/>
         </p:nvSpPr>

--- a/assets/fiches/B4-fiche-1h30.pptx
+++ b/assets/fiches/B4-fiche-1h30.pptx
@@ -3083,9 +3083,12 @@
   <p:cSld>
     <p:bg>
       <p:bgPr>
-        <a:solidFill>
-          <a:srgbClr val="FFFFFF"/>
-        </a:solidFill>
+        <a:blipFill>
+          <a:blip r:embed="rId2"/>
+          <a:stretch>
+            <a:fillRect/>
+          </a:stretch>
+        </a:blipFill>
         <a:effectLst/>
       </p:bgPr>
     </p:bg>
@@ -3096,35 +3099,9 @@
         <p:nvPr/>
       </p:nvGrpSpPr>
       <p:grpSpPr/>
-      <p:pic>
-        <p:nvPicPr>
-          <p:cNvPr id="2" name="Picture 1" descr="bg-p1.png"/>
-          <p:cNvPicPr>
-            <a:picLocks noChangeAspect="1"/>
-          </p:cNvPicPr>
-          <p:nvPr/>
-        </p:nvPicPr>
-        <p:blipFill>
-          <a:blip r:embed="rId2">
-            <a:alphaModFix amt="80000"/>
-          </a:blip>
-          <a:stretch>
-            <a:fillRect/>
-          </a:stretch>
-        </p:blipFill>
-        <p:spPr>
-          <a:xfrm>
-            <a:off x="0" y="0"/>
-            <a:ext cx="7556399" cy="10692000"/>
-          </a:xfrm>
-          <a:prstGeom prst="rect">
-            <a:avLst/>
-          </a:prstGeom>
-        </p:spPr>
-      </p:pic>
-      <p:sp>
-        <p:nvSpPr>
-          <p:cNvPr id="3" name="TextBox 2"/>
+      <p:sp>
+        <p:nvSpPr>
+          <p:cNvPr id="2" name="TextBox 1"/>
           <p:cNvSpPr txBox="1"/>
           <p:nvPr/>
         </p:nvSpPr>
@@ -3185,7 +3162,7 @@
       </p:sp>
       <p:sp>
         <p:nvSpPr>
-          <p:cNvPr id="4" name="Rectangle 3"/>
+          <p:cNvPr id="3" name="Rectangle 2"/>
           <p:cNvSpPr/>
           <p:nvPr/>
         </p:nvSpPr>
@@ -3228,7 +3205,7 @@
       </p:sp>
       <p:sp>
         <p:nvSpPr>
-          <p:cNvPr id="5" name="TextBox 4"/>
+          <p:cNvPr id="4" name="TextBox 3"/>
           <p:cNvSpPr txBox="1"/>
           <p:nvPr/>
         </p:nvSpPr>
@@ -3346,7 +3323,7 @@
       </p:sp>
       <p:sp>
         <p:nvSpPr>
-          <p:cNvPr id="6" name="Rectangle 5"/>
+          <p:cNvPr id="5" name="Rectangle 4"/>
           <p:cNvSpPr/>
           <p:nvPr/>
         </p:nvSpPr>
@@ -3389,7 +3366,7 @@
       </p:sp>
       <p:sp>
         <p:nvSpPr>
-          <p:cNvPr id="7" name="TextBox 6"/>
+          <p:cNvPr id="6" name="TextBox 5"/>
           <p:cNvSpPr txBox="1"/>
           <p:nvPr/>
         </p:nvSpPr>
@@ -3507,7 +3484,7 @@
       </p:sp>
       <p:sp>
         <p:nvSpPr>
-          <p:cNvPr id="8" name="Rectangle 7"/>
+          <p:cNvPr id="7" name="Rectangle 6"/>
           <p:cNvSpPr/>
           <p:nvPr/>
         </p:nvSpPr>
@@ -3550,7 +3527,7 @@
       </p:sp>
       <p:sp>
         <p:nvSpPr>
-          <p:cNvPr id="9" name="Rectangle 8"/>
+          <p:cNvPr id="8" name="Rectangle 7"/>
           <p:cNvSpPr/>
           <p:nvPr/>
         </p:nvSpPr>
@@ -3591,7 +3568,7 @@
       </p:sp>
       <p:sp>
         <p:nvSpPr>
-          <p:cNvPr id="10" name="Rectangle 9"/>
+          <p:cNvPr id="9" name="Rectangle 8"/>
           <p:cNvSpPr/>
           <p:nvPr/>
         </p:nvSpPr>
@@ -3632,7 +3609,7 @@
       </p:sp>
       <p:sp>
         <p:nvSpPr>
-          <p:cNvPr id="11" name="TextBox 10"/>
+          <p:cNvPr id="10" name="TextBox 9"/>
           <p:cNvSpPr txBox="1"/>
           <p:nvPr/>
         </p:nvSpPr>
@@ -3674,7 +3651,7 @@
       </p:sp>
       <p:sp>
         <p:nvSpPr>
-          <p:cNvPr id="12" name="TextBox 11"/>
+          <p:cNvPr id="11" name="TextBox 10"/>
           <p:cNvSpPr txBox="1"/>
           <p:nvPr/>
         </p:nvSpPr>
@@ -3754,7 +3731,7 @@
       </p:sp>
       <p:sp>
         <p:nvSpPr>
-          <p:cNvPr id="13" name="Rectangle 12"/>
+          <p:cNvPr id="12" name="Rectangle 11"/>
           <p:cNvSpPr/>
           <p:nvPr/>
         </p:nvSpPr>
@@ -3797,7 +3774,7 @@
       </p:sp>
       <p:sp>
         <p:nvSpPr>
-          <p:cNvPr id="14" name="Rectangle 13"/>
+          <p:cNvPr id="13" name="Rectangle 12"/>
           <p:cNvSpPr/>
           <p:nvPr/>
         </p:nvSpPr>
@@ -3838,7 +3815,7 @@
       </p:sp>
       <p:sp>
         <p:nvSpPr>
-          <p:cNvPr id="15" name="Rectangle 14"/>
+          <p:cNvPr id="14" name="Rectangle 13"/>
           <p:cNvSpPr/>
           <p:nvPr/>
         </p:nvSpPr>
@@ -3879,7 +3856,7 @@
       </p:sp>
       <p:sp>
         <p:nvSpPr>
-          <p:cNvPr id="16" name="TextBox 15"/>
+          <p:cNvPr id="15" name="TextBox 14"/>
           <p:cNvSpPr txBox="1"/>
           <p:nvPr/>
         </p:nvSpPr>
@@ -3921,7 +3898,7 @@
       </p:sp>
       <p:sp>
         <p:nvSpPr>
-          <p:cNvPr id="17" name="TextBox 16"/>
+          <p:cNvPr id="16" name="TextBox 15"/>
           <p:cNvSpPr txBox="1"/>
           <p:nvPr/>
         </p:nvSpPr>
@@ -4001,7 +3978,7 @@
       </p:sp>
       <p:sp>
         <p:nvSpPr>
-          <p:cNvPr id="18" name="Rectangle 17"/>
+          <p:cNvPr id="17" name="Rectangle 16"/>
           <p:cNvSpPr/>
           <p:nvPr/>
         </p:nvSpPr>
@@ -4044,7 +4021,7 @@
       </p:sp>
       <p:sp>
         <p:nvSpPr>
-          <p:cNvPr id="19" name="Rectangle 18"/>
+          <p:cNvPr id="18" name="Rectangle 17"/>
           <p:cNvSpPr/>
           <p:nvPr/>
         </p:nvSpPr>
@@ -4085,7 +4062,7 @@
       </p:sp>
       <p:sp>
         <p:nvSpPr>
-          <p:cNvPr id="20" name="Rectangle 19"/>
+          <p:cNvPr id="19" name="Rectangle 18"/>
           <p:cNvSpPr/>
           <p:nvPr/>
         </p:nvSpPr>
@@ -4126,7 +4103,7 @@
       </p:sp>
       <p:sp>
         <p:nvSpPr>
-          <p:cNvPr id="21" name="TextBox 20"/>
+          <p:cNvPr id="20" name="TextBox 19"/>
           <p:cNvSpPr txBox="1"/>
           <p:nvPr/>
         </p:nvSpPr>
@@ -4168,7 +4145,7 @@
       </p:sp>
       <p:sp>
         <p:nvSpPr>
-          <p:cNvPr id="22" name="TextBox 21"/>
+          <p:cNvPr id="21" name="TextBox 20"/>
           <p:cNvSpPr txBox="1"/>
           <p:nvPr/>
         </p:nvSpPr>
@@ -4248,7 +4225,7 @@
       </p:sp>
       <p:sp>
         <p:nvSpPr>
-          <p:cNvPr id="23" name="Rectangle 22"/>
+          <p:cNvPr id="22" name="Rectangle 21"/>
           <p:cNvSpPr/>
           <p:nvPr/>
         </p:nvSpPr>
@@ -4291,7 +4268,7 @@
       </p:sp>
       <p:sp>
         <p:nvSpPr>
-          <p:cNvPr id="24" name="Rectangle 23"/>
+          <p:cNvPr id="23" name="Rectangle 22"/>
           <p:cNvSpPr/>
           <p:nvPr/>
         </p:nvSpPr>
@@ -4332,7 +4309,7 @@
       </p:sp>
       <p:sp>
         <p:nvSpPr>
-          <p:cNvPr id="25" name="Rectangle 24"/>
+          <p:cNvPr id="24" name="Rectangle 23"/>
           <p:cNvSpPr/>
           <p:nvPr/>
         </p:nvSpPr>
@@ -4373,7 +4350,7 @@
       </p:sp>
       <p:sp>
         <p:nvSpPr>
-          <p:cNvPr id="26" name="TextBox 25"/>
+          <p:cNvPr id="25" name="TextBox 24"/>
           <p:cNvSpPr txBox="1"/>
           <p:nvPr/>
         </p:nvSpPr>
@@ -4415,7 +4392,7 @@
       </p:sp>
       <p:sp>
         <p:nvSpPr>
-          <p:cNvPr id="27" name="TextBox 26"/>
+          <p:cNvPr id="26" name="TextBox 25"/>
           <p:cNvSpPr txBox="1"/>
           <p:nvPr/>
         </p:nvSpPr>
@@ -4495,7 +4472,7 @@
       </p:sp>
       <p:sp>
         <p:nvSpPr>
-          <p:cNvPr id="28" name="Rectangle 27"/>
+          <p:cNvPr id="27" name="Rectangle 26"/>
           <p:cNvSpPr/>
           <p:nvPr/>
         </p:nvSpPr>
@@ -4538,7 +4515,7 @@
       </p:sp>
       <p:sp>
         <p:nvSpPr>
-          <p:cNvPr id="29" name="Rectangle 28"/>
+          <p:cNvPr id="28" name="Rectangle 27"/>
           <p:cNvSpPr/>
           <p:nvPr/>
         </p:nvSpPr>
@@ -4579,7 +4556,7 @@
       </p:sp>
       <p:sp>
         <p:nvSpPr>
-          <p:cNvPr id="30" name="Rectangle 29"/>
+          <p:cNvPr id="29" name="Rectangle 28"/>
           <p:cNvSpPr/>
           <p:nvPr/>
         </p:nvSpPr>
@@ -4620,7 +4597,7 @@
       </p:sp>
       <p:sp>
         <p:nvSpPr>
-          <p:cNvPr id="31" name="TextBox 30"/>
+          <p:cNvPr id="30" name="TextBox 29"/>
           <p:cNvSpPr txBox="1"/>
           <p:nvPr/>
         </p:nvSpPr>
@@ -4662,7 +4639,7 @@
       </p:sp>
       <p:sp>
         <p:nvSpPr>
-          <p:cNvPr id="32" name="TextBox 31"/>
+          <p:cNvPr id="31" name="TextBox 30"/>
           <p:cNvSpPr txBox="1"/>
           <p:nvPr/>
         </p:nvSpPr>
@@ -4742,7 +4719,7 @@
       </p:sp>
       <p:sp>
         <p:nvSpPr>
-          <p:cNvPr id="33" name="Rectangle 32"/>
+          <p:cNvPr id="32" name="Rectangle 31"/>
           <p:cNvSpPr/>
           <p:nvPr/>
         </p:nvSpPr>
@@ -4785,7 +4762,7 @@
       </p:sp>
       <p:sp>
         <p:nvSpPr>
-          <p:cNvPr id="34" name="Rectangle 33"/>
+          <p:cNvPr id="33" name="Rectangle 32"/>
           <p:cNvSpPr/>
           <p:nvPr/>
         </p:nvSpPr>
@@ -4826,7 +4803,7 @@
       </p:sp>
       <p:sp>
         <p:nvSpPr>
-          <p:cNvPr id="35" name="Rectangle 34"/>
+          <p:cNvPr id="34" name="Rectangle 33"/>
           <p:cNvSpPr/>
           <p:nvPr/>
         </p:nvSpPr>
@@ -4867,7 +4844,7 @@
       </p:sp>
       <p:sp>
         <p:nvSpPr>
-          <p:cNvPr id="36" name="TextBox 35"/>
+          <p:cNvPr id="35" name="TextBox 34"/>
           <p:cNvSpPr txBox="1"/>
           <p:nvPr/>
         </p:nvSpPr>
@@ -4909,7 +4886,7 @@
       </p:sp>
       <p:sp>
         <p:nvSpPr>
-          <p:cNvPr id="37" name="TextBox 36"/>
+          <p:cNvPr id="36" name="TextBox 35"/>
           <p:cNvSpPr txBox="1"/>
           <p:nvPr/>
         </p:nvSpPr>
@@ -4989,7 +4966,7 @@
       </p:sp>
       <p:sp>
         <p:nvSpPr>
-          <p:cNvPr id="38" name="Rectangle 37"/>
+          <p:cNvPr id="37" name="Rectangle 36"/>
           <p:cNvSpPr/>
           <p:nvPr/>
         </p:nvSpPr>
@@ -5032,7 +5009,7 @@
       </p:sp>
       <p:sp>
         <p:nvSpPr>
-          <p:cNvPr id="39" name="Rectangle 38"/>
+          <p:cNvPr id="38" name="Rectangle 37"/>
           <p:cNvSpPr/>
           <p:nvPr/>
         </p:nvSpPr>
@@ -5073,7 +5050,7 @@
       </p:sp>
       <p:sp>
         <p:nvSpPr>
-          <p:cNvPr id="40" name="Rectangle 39"/>
+          <p:cNvPr id="39" name="Rectangle 38"/>
           <p:cNvSpPr/>
           <p:nvPr/>
         </p:nvSpPr>
@@ -5114,7 +5091,7 @@
       </p:sp>
       <p:sp>
         <p:nvSpPr>
-          <p:cNvPr id="41" name="TextBox 40"/>
+          <p:cNvPr id="40" name="TextBox 39"/>
           <p:cNvSpPr txBox="1"/>
           <p:nvPr/>
         </p:nvSpPr>
@@ -5156,7 +5133,7 @@
       </p:sp>
       <p:sp>
         <p:nvSpPr>
-          <p:cNvPr id="42" name="TextBox 41"/>
+          <p:cNvPr id="41" name="TextBox 40"/>
           <p:cNvSpPr txBox="1"/>
           <p:nvPr/>
         </p:nvSpPr>
@@ -5236,7 +5213,7 @@
       </p:sp>
       <p:sp>
         <p:nvSpPr>
-          <p:cNvPr id="43" name="Rectangle 42"/>
+          <p:cNvPr id="42" name="Rectangle 41"/>
           <p:cNvSpPr/>
           <p:nvPr/>
         </p:nvSpPr>
@@ -5279,7 +5256,7 @@
       </p:sp>
       <p:sp>
         <p:nvSpPr>
-          <p:cNvPr id="44" name="Rectangle 43"/>
+          <p:cNvPr id="43" name="Rectangle 42"/>
           <p:cNvSpPr/>
           <p:nvPr/>
         </p:nvSpPr>
@@ -5320,7 +5297,7 @@
       </p:sp>
       <p:sp>
         <p:nvSpPr>
-          <p:cNvPr id="45" name="Rectangle 44"/>
+          <p:cNvPr id="44" name="Rectangle 43"/>
           <p:cNvSpPr/>
           <p:nvPr/>
         </p:nvSpPr>
@@ -5361,7 +5338,7 @@
       </p:sp>
       <p:sp>
         <p:nvSpPr>
-          <p:cNvPr id="46" name="TextBox 45"/>
+          <p:cNvPr id="45" name="TextBox 44"/>
           <p:cNvSpPr txBox="1"/>
           <p:nvPr/>
         </p:nvSpPr>
@@ -5403,7 +5380,7 @@
       </p:sp>
       <p:sp>
         <p:nvSpPr>
-          <p:cNvPr id="47" name="TextBox 46"/>
+          <p:cNvPr id="46" name="TextBox 45"/>
           <p:cNvSpPr txBox="1"/>
           <p:nvPr/>
         </p:nvSpPr>
@@ -5483,7 +5460,7 @@
       </p:sp>
       <p:sp>
         <p:nvSpPr>
-          <p:cNvPr id="48" name="Rectangle 47"/>
+          <p:cNvPr id="47" name="Rectangle 46"/>
           <p:cNvSpPr/>
           <p:nvPr/>
         </p:nvSpPr>
@@ -5526,7 +5503,7 @@
       </p:sp>
       <p:sp>
         <p:nvSpPr>
-          <p:cNvPr id="49" name="Rectangle 48"/>
+          <p:cNvPr id="48" name="Rectangle 47"/>
           <p:cNvSpPr/>
           <p:nvPr/>
         </p:nvSpPr>
@@ -5567,7 +5544,7 @@
       </p:sp>
       <p:sp>
         <p:nvSpPr>
-          <p:cNvPr id="50" name="Rectangle 49"/>
+          <p:cNvPr id="49" name="Rectangle 48"/>
           <p:cNvSpPr/>
           <p:nvPr/>
         </p:nvSpPr>
@@ -5608,7 +5585,7 @@
       </p:sp>
       <p:sp>
         <p:nvSpPr>
-          <p:cNvPr id="51" name="TextBox 50"/>
+          <p:cNvPr id="50" name="TextBox 49"/>
           <p:cNvSpPr txBox="1"/>
           <p:nvPr/>
         </p:nvSpPr>
@@ -5650,7 +5627,7 @@
       </p:sp>
       <p:sp>
         <p:nvSpPr>
-          <p:cNvPr id="52" name="TextBox 51"/>
+          <p:cNvPr id="51" name="TextBox 50"/>
           <p:cNvSpPr txBox="1"/>
           <p:nvPr/>
         </p:nvSpPr>
@@ -5730,7 +5707,7 @@
       </p:sp>
       <p:sp>
         <p:nvSpPr>
-          <p:cNvPr id="53" name="Rectangle 52"/>
+          <p:cNvPr id="52" name="Rectangle 51"/>
           <p:cNvSpPr/>
           <p:nvPr/>
         </p:nvSpPr>
@@ -5771,7 +5748,7 @@
       </p:sp>
       <p:sp>
         <p:nvSpPr>
-          <p:cNvPr id="54" name="TextBox 53"/>
+          <p:cNvPr id="53" name="TextBox 52"/>
           <p:cNvSpPr txBox="1"/>
           <p:nvPr/>
         </p:nvSpPr>

--- a/assets/fiches/B4-fiche-1h30.pptx
+++ b/assets/fiches/B4-fiche-1h30.pptx
@@ -6,6 +6,7 @@
   </p:sldMasterIdLst>
   <p:sldIdLst>
     <p:sldId id="256" r:id="rId7"/>
+    <p:sldId id="257" r:id="rId8"/>
   </p:sldIdLst>
   <p:sldSz cx="7556399" cy="10692000" type="screen4x3"/>
   <p:notesSz cx="6858000" cy="9144000"/>
@@ -3155,7 +3156,7 @@
                 </a:solidFill>
                 <a:latin typeface="Arial"/>
               </a:rPr>
-              <a:t>Fiche Action | 1h10 | Guide d'animation — Conseillers Numériques CD47</a:t>
+              <a:t>Fiche Action | 1h26 | Guide d'animation — Conseillers Numériques CD47</a:t>
             </a:r>
           </a:p>
         </p:txBody>
@@ -4465,7 +4466,7 @@
                 </a:solidFill>
                 <a:latin typeface="Arial"/>
               </a:rPr>
-              <a:t>. Le site est organisé de manière logique. Voici comment l'utiliser efficacement, étape par étape, même si vous n'êtes pas à l'aise avec Internet.</a:t>
+              <a:t>. Le site est organisé de manière logique. Voici comment l'utiliser efficacement, étape par étape, même si_x000B_vous n'êtes pas à l'aise avec Internet.</a:t>
             </a:r>
           </a:p>
         </p:txBody>
@@ -4959,7 +4960,7 @@
                 </a:solidFill>
                 <a:latin typeface="Arial"/>
               </a:rPr>
-              <a:t>. FranceConnect est un dispositif officiel de l'État qui vous permet de vous connecter à la majorité des services publics en ligne avec un seul identifiant. Plus besoin de retenir des dizaines de mots de passe différents !</a:t>
+              <a:t>. FranceConnect est un dispositif officiel de l'État qui vous permet de vous connecter à la majorité des services publics en ligne_x000B_avec un seul identifiant. Plus besoin de retenir des dizaines de mots de passe différents !</a:t>
             </a:r>
           </a:p>
         </p:txBody>
@@ -5705,9 +5706,532 @@
           </a:p>
         </p:txBody>
       </p:sp>
-      <p:sp>
-        <p:nvSpPr>
-          <p:cNvPr id="52" name="Rectangle 51"/>
+    </p:spTree>
+  </p:cSld>
+  <p:clrMapOvr>
+    <a:masterClrMapping/>
+  </p:clrMapOvr>
+</p:sld>
+</file>
+
+<file path=ppt/slides/slide2.xml><?xml version="1.0" encoding="utf-8"?>
+<p:sld xmlns:a="http://schemas.openxmlformats.org/drawingml/2006/main" xmlns:p="http://schemas.openxmlformats.org/presentationml/2006/main" xmlns:r="http://schemas.openxmlformats.org/officeDocument/2006/relationships">
+  <p:cSld>
+    <p:bg>
+      <p:bgPr>
+        <a:blipFill>
+          <a:blip r:embed="rId2"/>
+          <a:stretch>
+            <a:fillRect/>
+          </a:stretch>
+        </a:blipFill>
+        <a:effectLst/>
+      </p:bgPr>
+    </p:bg>
+    <p:spTree>
+      <p:nvGrpSpPr>
+        <p:cNvPr id="1" name=""/>
+        <p:cNvGrpSpPr/>
+        <p:nvPr/>
+      </p:nvGrpSpPr>
+      <p:grpSpPr/>
+      <p:sp>
+        <p:nvSpPr>
+          <p:cNvPr id="2" name="Rectangle 1"/>
+          <p:cNvSpPr/>
+          <p:nvPr/>
+        </p:nvSpPr>
+        <p:spPr>
+          <a:xfrm>
+            <a:off x="529200" y="540000"/>
+            <a:ext cx="6498000" cy="748800"/>
+          </a:xfrm>
+          <a:prstGeom prst="rect">
+            <a:avLst/>
+          </a:prstGeom>
+          <a:solidFill>
+            <a:srgbClr val="F8F9FD"/>
+          </a:solidFill>
+          <a:ln w="6350">
+            <a:solidFill>
+              <a:srgbClr val="DDE6ED"/>
+            </a:solidFill>
+          </a:ln>
+        </p:spPr>
+        <p:style>
+          <a:lnRef idx="1">
+            <a:schemeClr val="accent1"/>
+          </a:lnRef>
+          <a:fillRef idx="3">
+            <a:schemeClr val="accent1"/>
+          </a:fillRef>
+          <a:effectRef idx="2">
+            <a:schemeClr val="accent1"/>
+          </a:effectRef>
+          <a:fontRef idx="minor">
+            <a:schemeClr val="lt1"/>
+          </a:fontRef>
+        </p:style>
+        <p:txBody>
+          <a:bodyPr rtlCol="0" anchor="ctr"/>
+          <a:lstStyle/>
+          <a:p/>
+        </p:txBody>
+      </p:sp>
+      <p:sp>
+        <p:nvSpPr>
+          <p:cNvPr id="3" name="Rectangle 2"/>
+          <p:cNvSpPr/>
+          <p:nvPr/>
+        </p:nvSpPr>
+        <p:spPr>
+          <a:xfrm>
+            <a:off x="529200" y="540000"/>
+            <a:ext cx="198000" cy="748800"/>
+          </a:xfrm>
+          <a:prstGeom prst="rect">
+            <a:avLst/>
+          </a:prstGeom>
+          <a:solidFill>
+            <a:srgbClr val="4388BC"/>
+          </a:solidFill>
+          <a:ln>
+            <a:noFill/>
+          </a:ln>
+        </p:spPr>
+        <p:style>
+          <a:lnRef idx="1">
+            <a:schemeClr val="accent1"/>
+          </a:lnRef>
+          <a:fillRef idx="3">
+            <a:schemeClr val="accent1"/>
+          </a:fillRef>
+          <a:effectRef idx="2">
+            <a:schemeClr val="accent1"/>
+          </a:effectRef>
+          <a:fontRef idx="minor">
+            <a:schemeClr val="lt1"/>
+          </a:fontRef>
+        </p:style>
+        <p:txBody>
+          <a:bodyPr rtlCol="0" anchor="ctr"/>
+          <a:lstStyle/>
+          <a:p/>
+        </p:txBody>
+      </p:sp>
+      <p:sp>
+        <p:nvSpPr>
+          <p:cNvPr id="4" name="Rectangle 3"/>
+          <p:cNvSpPr/>
+          <p:nvPr/>
+        </p:nvSpPr>
+        <p:spPr>
+          <a:xfrm>
+            <a:off x="763200" y="835200"/>
+            <a:ext cx="468000" cy="158400"/>
+          </a:xfrm>
+          <a:prstGeom prst="rect">
+            <a:avLst/>
+          </a:prstGeom>
+          <a:solidFill>
+            <a:srgbClr val="4388BC"/>
+          </a:solidFill>
+          <a:ln>
+            <a:noFill/>
+          </a:ln>
+        </p:spPr>
+        <p:style>
+          <a:lnRef idx="1">
+            <a:schemeClr val="accent1"/>
+          </a:lnRef>
+          <a:fillRef idx="3">
+            <a:schemeClr val="accent1"/>
+          </a:fillRef>
+          <a:effectRef idx="2">
+            <a:schemeClr val="accent1"/>
+          </a:effectRef>
+          <a:fontRef idx="minor">
+            <a:schemeClr val="lt1"/>
+          </a:fontRef>
+        </p:style>
+        <p:txBody>
+          <a:bodyPr rtlCol="0" anchor="ctr"/>
+          <a:lstStyle/>
+          <a:p/>
+        </p:txBody>
+      </p:sp>
+      <p:sp>
+        <p:nvSpPr>
+          <p:cNvPr id="5" name="TextBox 4"/>
+          <p:cNvSpPr txBox="1"/>
+          <p:nvPr/>
+        </p:nvSpPr>
+        <p:spPr>
+          <a:xfrm>
+            <a:off x="763200" y="835200"/>
+            <a:ext cx="468000" cy="158400"/>
+          </a:xfrm>
+          <a:prstGeom prst="rect">
+            <a:avLst/>
+          </a:prstGeom>
+          <a:noFill/>
+        </p:spPr>
+        <p:txBody>
+          <a:bodyPr wrap="square" tIns="0" bIns="0" lIns="18000" rIns="18000">
+            <a:spAutoFit/>
+          </a:bodyPr>
+          <a:lstStyle/>
+          <a:p>
+            <a:pPr algn="ctr">
+              <a:spcBef>
+                <a:spcPts val="0"/>
+              </a:spcBef>
+              <a:spcAft>
+                <a:spcPts val="100"/>
+              </a:spcAft>
+            </a:pPr>
+            <a:r>
+              <a:rPr sz="800" b="1" i="0">
+                <a:solidFill>
+                  <a:srgbClr val="FFFFFF"/>
+                </a:solidFill>
+                <a:latin typeface="Arial"/>
+              </a:rPr>
+              <a:t>1:10</a:t>
+            </a:r>
+          </a:p>
+        </p:txBody>
+      </p:sp>
+      <p:sp>
+        <p:nvSpPr>
+          <p:cNvPr id="6" name="TextBox 5"/>
+          <p:cNvSpPr txBox="1"/>
+          <p:nvPr/>
+        </p:nvSpPr>
+        <p:spPr>
+          <a:xfrm>
+            <a:off x="1303200" y="604800"/>
+            <a:ext cx="5652000" cy="655200"/>
+          </a:xfrm>
+          <a:prstGeom prst="rect">
+            <a:avLst/>
+          </a:prstGeom>
+          <a:noFill/>
+        </p:spPr>
+        <p:txBody>
+          <a:bodyPr wrap="square" tIns="0" bIns="0" lIns="18000" rIns="18000">
+            <a:spAutoFit/>
+          </a:bodyPr>
+          <a:lstStyle/>
+          <a:p>
+            <a:pPr algn="l">
+              <a:spcBef>
+                <a:spcPts val="0"/>
+              </a:spcBef>
+              <a:spcAft>
+                <a:spcPts val="100"/>
+              </a:spcAft>
+            </a:pPr>
+            <a:r>
+              <a:rPr sz="800" b="1" i="0">
+                <a:solidFill>
+                  <a:srgbClr val="4388BC"/>
+                </a:solidFill>
+                <a:latin typeface="Arial"/>
+              </a:rPr>
+              <a:t>8 min</a:t>
+            </a:r>
+          </a:p>
+          <a:p>
+            <a:pPr algn="l">
+              <a:spcBef>
+                <a:spcPts val="0"/>
+              </a:spcBef>
+              <a:spcAft>
+                <a:spcPts val="100"/>
+              </a:spcAft>
+            </a:pPr>
+            <a:r>
+              <a:rPr sz="900" b="1" i="0">
+                <a:solidFill>
+                  <a:srgbClr val="2B2B2B"/>
+                </a:solidFill>
+                <a:latin typeface="Arial"/>
+              </a:rPr>
+              <a:t>Offre départementale d’Inclusion Numérique</a:t>
+            </a:r>
+          </a:p>
+          <a:p>
+            <a:pPr algn="l">
+              <a:spcBef>
+                <a:spcPts val="0"/>
+              </a:spcBef>
+              <a:spcAft>
+                <a:spcPts val="100"/>
+              </a:spcAft>
+            </a:pPr>
+            <a:r>
+              <a:rPr sz="800" b="0" i="0">
+                <a:solidFill>
+                  <a:srgbClr val="2B2B2B"/>
+                </a:solidFill>
+                <a:latin typeface="Arial"/>
+              </a:rPr>
+              <a:t>. Voici les 5 offres et services dispensés par l’équipe départementale</a:t>
+            </a:r>
+          </a:p>
+        </p:txBody>
+      </p:sp>
+      <p:sp>
+        <p:nvSpPr>
+          <p:cNvPr id="7" name="Rectangle 6"/>
+          <p:cNvSpPr/>
+          <p:nvPr/>
+        </p:nvSpPr>
+        <p:spPr>
+          <a:xfrm>
+            <a:off x="529200" y="1288800"/>
+            <a:ext cx="6498000" cy="748800"/>
+          </a:xfrm>
+          <a:prstGeom prst="rect">
+            <a:avLst/>
+          </a:prstGeom>
+          <a:solidFill>
+            <a:srgbClr val="F8F9FD"/>
+          </a:solidFill>
+          <a:ln w="6350">
+            <a:solidFill>
+              <a:srgbClr val="DDE6ED"/>
+            </a:solidFill>
+          </a:ln>
+        </p:spPr>
+        <p:style>
+          <a:lnRef idx="1">
+            <a:schemeClr val="accent1"/>
+          </a:lnRef>
+          <a:fillRef idx="3">
+            <a:schemeClr val="accent1"/>
+          </a:fillRef>
+          <a:effectRef idx="2">
+            <a:schemeClr val="accent1"/>
+          </a:effectRef>
+          <a:fontRef idx="minor">
+            <a:schemeClr val="lt1"/>
+          </a:fontRef>
+        </p:style>
+        <p:txBody>
+          <a:bodyPr rtlCol="0" anchor="ctr"/>
+          <a:lstStyle/>
+          <a:p/>
+        </p:txBody>
+      </p:sp>
+      <p:sp>
+        <p:nvSpPr>
+          <p:cNvPr id="8" name="Rectangle 7"/>
+          <p:cNvSpPr/>
+          <p:nvPr/>
+        </p:nvSpPr>
+        <p:spPr>
+          <a:xfrm>
+            <a:off x="529200" y="1288800"/>
+            <a:ext cx="198000" cy="748800"/>
+          </a:xfrm>
+          <a:prstGeom prst="rect">
+            <a:avLst/>
+          </a:prstGeom>
+          <a:solidFill>
+            <a:srgbClr val="187C88"/>
+          </a:solidFill>
+          <a:ln>
+            <a:noFill/>
+          </a:ln>
+        </p:spPr>
+        <p:style>
+          <a:lnRef idx="1">
+            <a:schemeClr val="accent1"/>
+          </a:lnRef>
+          <a:fillRef idx="3">
+            <a:schemeClr val="accent1"/>
+          </a:fillRef>
+          <a:effectRef idx="2">
+            <a:schemeClr val="accent1"/>
+          </a:effectRef>
+          <a:fontRef idx="minor">
+            <a:schemeClr val="lt1"/>
+          </a:fontRef>
+        </p:style>
+        <p:txBody>
+          <a:bodyPr rtlCol="0" anchor="ctr"/>
+          <a:lstStyle/>
+          <a:p/>
+        </p:txBody>
+      </p:sp>
+      <p:sp>
+        <p:nvSpPr>
+          <p:cNvPr id="9" name="Rectangle 8"/>
+          <p:cNvSpPr/>
+          <p:nvPr/>
+        </p:nvSpPr>
+        <p:spPr>
+          <a:xfrm>
+            <a:off x="763200" y="1584000"/>
+            <a:ext cx="468000" cy="158400"/>
+          </a:xfrm>
+          <a:prstGeom prst="rect">
+            <a:avLst/>
+          </a:prstGeom>
+          <a:solidFill>
+            <a:srgbClr val="187C88"/>
+          </a:solidFill>
+          <a:ln>
+            <a:noFill/>
+          </a:ln>
+        </p:spPr>
+        <p:style>
+          <a:lnRef idx="1">
+            <a:schemeClr val="accent1"/>
+          </a:lnRef>
+          <a:fillRef idx="3">
+            <a:schemeClr val="accent1"/>
+          </a:fillRef>
+          <a:effectRef idx="2">
+            <a:schemeClr val="accent1"/>
+          </a:effectRef>
+          <a:fontRef idx="minor">
+            <a:schemeClr val="lt1"/>
+          </a:fontRef>
+        </p:style>
+        <p:txBody>
+          <a:bodyPr rtlCol="0" anchor="ctr"/>
+          <a:lstStyle/>
+          <a:p/>
+        </p:txBody>
+      </p:sp>
+      <p:sp>
+        <p:nvSpPr>
+          <p:cNvPr id="10" name="TextBox 9"/>
+          <p:cNvSpPr txBox="1"/>
+          <p:nvPr/>
+        </p:nvSpPr>
+        <p:spPr>
+          <a:xfrm>
+            <a:off x="763200" y="1584000"/>
+            <a:ext cx="468000" cy="158400"/>
+          </a:xfrm>
+          <a:prstGeom prst="rect">
+            <a:avLst/>
+          </a:prstGeom>
+          <a:noFill/>
+        </p:spPr>
+        <p:txBody>
+          <a:bodyPr wrap="square" tIns="0" bIns="0" lIns="18000" rIns="18000">
+            <a:spAutoFit/>
+          </a:bodyPr>
+          <a:lstStyle/>
+          <a:p>
+            <a:pPr algn="ctr">
+              <a:spcBef>
+                <a:spcPts val="0"/>
+              </a:spcBef>
+              <a:spcAft>
+                <a:spcPts val="100"/>
+              </a:spcAft>
+            </a:pPr>
+            <a:r>
+              <a:rPr sz="800" b="1" i="0">
+                <a:solidFill>
+                  <a:srgbClr val="FFFFFF"/>
+                </a:solidFill>
+                <a:latin typeface="Arial"/>
+              </a:rPr>
+              <a:t>1:18</a:t>
+            </a:r>
+          </a:p>
+        </p:txBody>
+      </p:sp>
+      <p:sp>
+        <p:nvSpPr>
+          <p:cNvPr id="11" name="TextBox 10"/>
+          <p:cNvSpPr txBox="1"/>
+          <p:nvPr/>
+        </p:nvSpPr>
+        <p:spPr>
+          <a:xfrm>
+            <a:off x="1303200" y="1353600"/>
+            <a:ext cx="5652000" cy="655200"/>
+          </a:xfrm>
+          <a:prstGeom prst="rect">
+            <a:avLst/>
+          </a:prstGeom>
+          <a:noFill/>
+        </p:spPr>
+        <p:txBody>
+          <a:bodyPr wrap="square" tIns="0" bIns="0" lIns="18000" rIns="18000">
+            <a:spAutoFit/>
+          </a:bodyPr>
+          <a:lstStyle/>
+          <a:p>
+            <a:pPr algn="l">
+              <a:spcBef>
+                <a:spcPts val="0"/>
+              </a:spcBef>
+              <a:spcAft>
+                <a:spcPts val="100"/>
+              </a:spcAft>
+            </a:pPr>
+            <a:r>
+              <a:rPr sz="800" b="1" i="0">
+                <a:solidFill>
+                  <a:srgbClr val="187C88"/>
+                </a:solidFill>
+                <a:latin typeface="Arial"/>
+              </a:rPr>
+              <a:t>8 min</a:t>
+            </a:r>
+          </a:p>
+          <a:p>
+            <a:pPr algn="l">
+              <a:spcBef>
+                <a:spcPts val="0"/>
+              </a:spcBef>
+              <a:spcAft>
+                <a:spcPts val="100"/>
+              </a:spcAft>
+            </a:pPr>
+            <a:r>
+              <a:rPr sz="900" b="1" i="0">
+                <a:solidFill>
+                  <a:srgbClr val="2B2B2B"/>
+                </a:solidFill>
+                <a:latin typeface="Arial"/>
+              </a:rPr>
+              <a:t>Besoin d'aide ? Nous sommes là !</a:t>
+            </a:r>
+          </a:p>
+          <a:p>
+            <a:pPr algn="l">
+              <a:spcBef>
+                <a:spcPts val="0"/>
+              </a:spcBef>
+              <a:spcAft>
+                <a:spcPts val="100"/>
+              </a:spcAft>
+            </a:pPr>
+            <a:r>
+              <a:rPr sz="800" b="0" i="0">
+                <a:solidFill>
+                  <a:srgbClr val="2B2B2B"/>
+                </a:solidFill>
+                <a:latin typeface="Arial"/>
+              </a:rPr>
+              <a:t>. Pour nous joindre</a:t>
+            </a:r>
+          </a:p>
+        </p:txBody>
+      </p:sp>
+      <p:sp>
+        <p:nvSpPr>
+          <p:cNvPr id="12" name="Rectangle 11"/>
           <p:cNvSpPr/>
           <p:nvPr/>
         </p:nvSpPr>
@@ -5748,7 +6272,7 @@
       </p:sp>
       <p:sp>
         <p:nvSpPr>
-          <p:cNvPr id="53" name="TextBox 52"/>
+          <p:cNvPr id="13" name="TextBox 12"/>
           <p:cNvSpPr txBox="1"/>
           <p:nvPr/>
         </p:nvSpPr>
